--- a/media/resources/files/EkiOrunduuOnduktar_KoshuuKemituu1234pptx_PeLrAHi.pptx
+++ b/media/resources/files/EkiOrunduuOnduktar_KoshuuKemituu1234pptx_PeLrAHi.pptx
@@ -2041,7 +2041,7 @@
             <a:pPr algn="r"/>
             <a:r>
               <a:rPr lang="en-GB" sz="2000" dirty="0"/>
-              <a:t>0.16 + 0.23 = </a:t>
+              <a:t>0,16 + 0,23 = </a:t>
             </a:r>
           </a:p>
         </p:txBody>
@@ -2272,7 +2272,7 @@
             <a:pPr algn="r"/>
             <a:r>
               <a:rPr lang="en-GB" sz="2000" dirty="0"/>
-              <a:t>0.86 − 0.24 = </a:t>
+              <a:t>0,86 − 0,24 = </a:t>
             </a:r>
           </a:p>
         </p:txBody>
@@ -2308,7 +2308,7 @@
             <a:pPr algn="r"/>
             <a:r>
               <a:rPr lang="en-GB" sz="2000" dirty="0"/>
-              <a:t>0.28 + 0.34 = </a:t>
+              <a:t>0,28 + 0,34 = </a:t>
             </a:r>
           </a:p>
         </p:txBody>
@@ -2383,7 +2383,7 @@
             <a:pPr algn="r"/>
             <a:r>
               <a:rPr lang="en-GB" sz="2000" dirty="0"/>
-              <a:t>0.43 − 0.07 = </a:t>
+              <a:t>0,43 − 0,07 = </a:t>
             </a:r>
           </a:p>
         </p:txBody>
@@ -2419,7 +2419,7 @@
             <a:pPr algn="r"/>
             <a:r>
               <a:rPr lang="en-GB" sz="2000" dirty="0"/>
-              <a:t>2.37 + 1.18 + 0.2 = </a:t>
+              <a:t>2,37 + 1,18 + 0,2 = </a:t>
             </a:r>
           </a:p>
         </p:txBody>
@@ -2494,7 +2494,7 @@
             <a:pPr algn="r"/>
             <a:r>
               <a:rPr lang="en-GB" sz="2000" dirty="0"/>
-              <a:t>6.45 − 3.58 = </a:t>
+              <a:t>6,45 − 3,58 = </a:t>
             </a:r>
           </a:p>
         </p:txBody>
@@ -2530,7 +2530,7 @@
             <a:pPr algn="r"/>
             <a:r>
               <a:rPr lang="en-GB" sz="2000" dirty="0"/>
-              <a:t>8.52 + 3.791 = </a:t>
+              <a:t>8,52 + 3,791 = </a:t>
             </a:r>
           </a:p>
         </p:txBody>
@@ -2605,7 +2605,7 @@
             <a:pPr algn="r"/>
             <a:r>
               <a:rPr lang="en-GB" sz="2000" dirty="0"/>
-              <a:t>7.63 − 1.85 + 1.5 – 0.003 = </a:t>
+              <a:t>7,63 − 1,85 + 1,5 – 0,003 = </a:t>
             </a:r>
           </a:p>
         </p:txBody>
@@ -2765,7 +2765,7 @@
             <a:pPr algn="r"/>
             <a:r>
               <a:rPr lang="en-GB" sz="2000" dirty="0"/>
-              <a:t>0.16 + 0.23 = </a:t>
+              <a:t>0,16 + 0,23 = </a:t>
             </a:r>
           </a:p>
         </p:txBody>
@@ -3005,7 +3005,7 @@
             <a:pPr algn="just"/>
             <a:r>
               <a:rPr lang="en-GB" sz="2000" dirty="0"/>
-              <a:t>0.39</a:t>
+              <a:t>0,39</a:t>
             </a:r>
           </a:p>
         </p:txBody>
@@ -3041,7 +3041,7 @@
             <a:pPr algn="r"/>
             <a:r>
               <a:rPr lang="en-GB" sz="2000" dirty="0"/>
-              <a:t>0.86 − 0.24 = </a:t>
+              <a:t>0,86 − 0,24 = </a:t>
             </a:r>
           </a:p>
         </p:txBody>
@@ -3086,7 +3086,7 @@
             <a:pPr algn="just"/>
             <a:r>
               <a:rPr lang="en-GB" sz="2000" dirty="0"/>
-              <a:t>0.62</a:t>
+              <a:t>0,62</a:t>
             </a:r>
           </a:p>
         </p:txBody>
@@ -3122,7 +3122,7 @@
             <a:pPr algn="r"/>
             <a:r>
               <a:rPr lang="en-GB" sz="2000" dirty="0"/>
-              <a:t>0.28 + 0.34 = </a:t>
+              <a:t>0,28 + 0,34 = </a:t>
             </a:r>
           </a:p>
         </p:txBody>
@@ -3206,7 +3206,7 @@
             <a:pPr algn="just"/>
             <a:r>
               <a:rPr lang="en-GB" sz="2000" dirty="0"/>
-              <a:t>0.62</a:t>
+              <a:t>0,62</a:t>
             </a:r>
           </a:p>
         </p:txBody>
@@ -3242,7 +3242,7 @@
             <a:pPr algn="r"/>
             <a:r>
               <a:rPr lang="en-GB" sz="2000" dirty="0"/>
-              <a:t>0.43 − 0.07 = </a:t>
+              <a:t>0,43 − 0,07 = </a:t>
             </a:r>
           </a:p>
         </p:txBody>
@@ -3287,7 +3287,7 @@
             <a:pPr algn="just"/>
             <a:r>
               <a:rPr lang="en-GB" sz="2000" dirty="0"/>
-              <a:t>0.36</a:t>
+              <a:t>0,36</a:t>
             </a:r>
           </a:p>
         </p:txBody>
@@ -3323,7 +3323,7 @@
             <a:pPr algn="r"/>
             <a:r>
               <a:rPr lang="en-GB" sz="2000" dirty="0"/>
-              <a:t>2.37 + 1.18 + 0.2 = </a:t>
+              <a:t>2,37 + 1,18 + 0,2 = </a:t>
             </a:r>
           </a:p>
         </p:txBody>
@@ -3407,7 +3407,7 @@
             <a:pPr algn="just"/>
             <a:r>
               <a:rPr lang="en-GB" sz="2000" dirty="0"/>
-              <a:t>3.75</a:t>
+              <a:t>3,75</a:t>
             </a:r>
           </a:p>
         </p:txBody>
@@ -3443,7 +3443,7 @@
             <a:pPr algn="r"/>
             <a:r>
               <a:rPr lang="en-GB" sz="2000" dirty="0"/>
-              <a:t>6.45 − 3.58 = </a:t>
+              <a:t>6,45 − 3,58 = </a:t>
             </a:r>
           </a:p>
         </p:txBody>
@@ -3488,7 +3488,7 @@
             <a:pPr algn="just"/>
             <a:r>
               <a:rPr lang="en-GB" sz="2000" dirty="0"/>
-              <a:t>2.87</a:t>
+              <a:t>2,87</a:t>
             </a:r>
           </a:p>
         </p:txBody>
@@ -3524,7 +3524,7 @@
             <a:pPr algn="r"/>
             <a:r>
               <a:rPr lang="en-GB" sz="2000" dirty="0"/>
-              <a:t>8.52 + 3.791 = </a:t>
+              <a:t>8,52 + 3,791 = </a:t>
             </a:r>
           </a:p>
         </p:txBody>
@@ -3608,7 +3608,7 @@
             <a:pPr algn="just"/>
             <a:r>
               <a:rPr lang="en-GB" sz="2000" dirty="0"/>
-              <a:t>12.311</a:t>
+              <a:t>12,311</a:t>
             </a:r>
           </a:p>
         </p:txBody>
@@ -3644,7 +3644,7 @@
             <a:pPr algn="r"/>
             <a:r>
               <a:rPr lang="en-GB" sz="2000" dirty="0"/>
-              <a:t>7.63 − 1.85 + 1.5 – 0.003 = </a:t>
+              <a:t>7,63 − 1,85 + 1,5 – 0,003 = </a:t>
             </a:r>
           </a:p>
         </p:txBody>
@@ -3689,7 +3689,7 @@
             <a:pPr algn="just"/>
             <a:r>
               <a:rPr lang="en-GB" sz="2000" dirty="0"/>
-              <a:t>7.277</a:t>
+              <a:t>7,277</a:t>
             </a:r>
           </a:p>
         </p:txBody>
